--- a/docs/sentinel-ci-demo-deck-2026-05-25.pptx
+++ b/docs/sentinel-ci-demo-deck-2026-05-25.pptx
@@ -3978,7 +3978,7 @@
       </p:sp>
       <p:pic>
         <p:nvPicPr>
-          <p:cNvPr descr="status-screenshots/2026-05-25-demo-eve/06-carte-fullscreen.png" id="0" name="Picture 1"/>
+          <p:cNvPr descr="status-screenshots/2026-05-25-postdeploy/19-aya-focus-nord-napie.png" id="0" name="Picture 1"/>
           <p:cNvPicPr>
             <a:picLocks noGrp="1" noChangeAspect="1"/>
           </p:cNvPicPr>
@@ -4033,7 +4033,7 @@
             </a:pPr>
             <a:r>
               <a:rPr/>
-              <a:t>Carte plein écran · zone Nord</a:t>
+              <a:t>Carte stratégie · focus zone Nord + projet Centre Drones Napié (briefing opérationnel ouvert)</a:t>
             </a:r>
           </a:p>
         </p:txBody>
@@ -4274,7 +4274,481 @@
       </p:sp>
       <p:pic>
         <p:nvPicPr>
-          <p:cNvPr descr="status-screenshots/2026-05-25-demo-eve/04-cockpit-carte.png" id="0" name="Picture 1"/>
+          <p:cNvPr descr="status-screenshots/2026-05-25-postdeploy/17-aya-vessel-cargo.png" id="0" name="Picture 1"/>
+          <p:cNvPicPr>
+            <a:picLocks noGrp="1" noChangeAspect="1"/>
+          </p:cNvPicPr>
+          <p:nvPr/>
+        </p:nvPicPr>
+        <p:blipFill>
+          <a:blip r:embed="rId2"/>
+          <a:stretch>
+            <a:fillRect/>
+          </a:stretch>
+        </p:blipFill>
+        <p:spPr bwMode="auto">
+          <a:xfrm>
+            <a:off x="3568700" y="406400"/>
+            <a:ext cx="5105400" cy="3467100"/>
+          </a:xfrm>
+          <a:prstGeom prst="rect">
+            <a:avLst/>
+          </a:prstGeom>
+          <a:noFill/>
+          <a:ln w="9525">
+            <a:noFill/>
+            <a:headEnd/>
+            <a:tailEnd/>
+          </a:ln>
+        </p:spPr>
+      </p:pic>
+      <p:sp>
+        <p:nvSpPr>
+          <p:cNvPr id="1" name="TextBox 3"/>
+          <p:cNvSpPr txBox="1"/>
+          <p:nvPr>
+            <p:ph idx="1"/>
+          </p:nvPr>
+        </p:nvSpPr>
+        <p:spPr>
+          <a:xfrm>
+            <a:off x="3568700" y="4076700"/>
+            <a:ext cx="5105400" cy="508000"/>
+          </a:xfrm>
+          <a:prstGeom prst="rect">
+            <a:avLst/>
+          </a:prstGeom>
+          <a:noFill/>
+        </p:spPr>
+        <p:txBody>
+          <a:bodyPr/>
+          <a:lstStyle/>
+          <a:p>
+            <a:pPr lvl="0" indent="0" marL="0" algn="ctr">
+              <a:buNone/>
+            </a:pPr>
+            <a:r>
+              <a:rPr/>
+              <a:t>Mission Control · carte + webcam APM Apapa Gate #1 (cargo demo Port Vridi) — 16/16 flux terrain</a:t>
+            </a:r>
+          </a:p>
+        </p:txBody>
+      </p:sp>
+    </p:spTree>
+  </p:cSld>
+</p:sld>
+</file>
+
+<file path=ppt/slides/slide16.xml><?xml version="1.0" encoding="utf-8"?>
+<p:sld xmlns:a="http://schemas.openxmlformats.org/drawingml/2006/main" xmlns:r="http://schemas.openxmlformats.org/officeDocument/2006/relationships" xmlns:p="http://schemas.openxmlformats.org/presentationml/2006/main">
+  <p:cSld>
+    <p:spTree>
+      <p:nvGrpSpPr>
+        <p:cNvPr id="1" name=""/>
+        <p:cNvGrpSpPr/>
+        <p:nvPr/>
+      </p:nvGrpSpPr>
+      <p:grpSpPr>
+        <a:xfrm>
+          <a:off x="0" y="0"/>
+          <a:ext cx="0" cy="0"/>
+          <a:chOff x="0" y="0"/>
+          <a:chExt cx="0" cy="0"/>
+        </a:xfrm>
+      </p:grpSpPr>
+      <p:sp>
+        <p:nvSpPr>
+          <p:cNvPr id="2" name="Title 1"/>
+          <p:cNvSpPr>
+            <a:spLocks noGrp="1"/>
+          </p:cNvSpPr>
+          <p:nvPr>
+            <p:ph type="title"/>
+          </p:nvPr>
+        </p:nvSpPr>
+        <p:spPr>
+          <a:xfrm>
+            <a:off x="457201" y="204787"/>
+            <a:ext cx="3008313" cy="871538"/>
+          </a:xfrm>
+        </p:spPr>
+        <p:txBody>
+          <a:bodyPr/>
+          <a:lstStyle/>
+          <a:p>
+            <a:pPr lvl="0" indent="0" marL="0">
+              <a:buNone/>
+            </a:pPr>
+            <a:r>
+              <a:rPr/>
+              <a:t>S1.5 · Situation au port (vue d’ensemble maritime)</a:t>
+            </a:r>
+          </a:p>
+        </p:txBody>
+      </p:sp>
+      <p:sp>
+        <p:nvSpPr>
+          <p:cNvPr id="4" name="Text Placeholder 3"/>
+          <p:cNvSpPr>
+            <a:spLocks noGrp="1"/>
+          </p:cNvSpPr>
+          <p:nvPr>
+            <p:ph idx="2" sz="half" type="body"/>
+          </p:nvPr>
+        </p:nvSpPr>
+        <p:spPr/>
+        <p:txBody>
+          <a:bodyPr/>
+          <a:lstStyle/>
+          <a:p>
+            <a:pPr lvl="0" indent="0" marL="0">
+              <a:buNone/>
+            </a:pPr>
+            <a:r>
+              <a:rPr b="1"/>
+              <a:t>Phrase AYA</a:t>
+            </a:r>
+            <a:r>
+              <a:rPr/>
+              <a:t> : </a:t>
+            </a:r>
+            <a:r>
+              <a:rPr>
+                <a:latin typeface="Courier"/>
+              </a:rPr>
+              <a:t>AYA, montre la situation au port.</a:t>
+            </a:r>
+            <a:r>
+              <a:rPr/>
+              <a:t> </a:t>
+            </a:r>
+            <a:r>
+              <a:rPr i="1"/>
+              <a:t>(action nouvelle — commit </a:t>
+            </a:r>
+            <a:r>
+              <a:rPr i="1">
+                <a:latin typeface="Courier"/>
+              </a:rPr>
+              <a:t>6335d460</a:t>
+            </a:r>
+            <a:r>
+              <a:rPr i="1"/>
+              <a:t>)</a:t>
+            </a:r>
+          </a:p>
+          <a:p>
+            <a:pPr lvl="0" indent="0" marL="0">
+              <a:buNone/>
+            </a:pPr>
+            <a:r>
+              <a:rPr b="1"/>
+              <a:t>Plan B clic</a:t>
+            </a:r>
+            <a:r>
+              <a:rPr/>
+              <a:t> : Stratégie → bouton </a:t>
+            </a:r>
+            <a:r>
+              <a:rPr b="1"/>
+              <a:t>Mode live · Maritime</a:t>
+            </a:r>
+            <a:r>
+              <a:rPr/>
+              <a:t> → grille webcams + panel AIS Vridi.</a:t>
+            </a:r>
+          </a:p>
+          <a:p>
+            <a:pPr lvl="0" indent="0" marL="0">
+              <a:buNone/>
+            </a:pPr>
+            <a:r>
+              <a:rPr b="1"/>
+              <a:t>Effet attendu</a:t>
+            </a:r>
+            <a:r>
+              <a:rPr/>
+              <a:t> : - Vue port Abidjan (map zoomée Vridi) - Panel maritime ouvert · liste 16 navires - Webcam APM Apapa en tête de la grille</a:t>
+            </a:r>
+          </a:p>
+          <a:p>
+            <a:pPr lvl="0" indent="0" marL="0">
+              <a:buNone/>
+            </a:pPr>
+            <a:r>
+              <a:rPr>
+                <a:latin typeface="Courier"/>
+              </a:rPr>
+              <a:t>Action : aya.show_maritime_traffic</a:t>
+            </a:r>
+            <a:r>
+              <a:rPr/>
+              <a:t> </a:t>
+            </a:r>
+            <a:r>
+              <a:rPr>
+                <a:latin typeface="Courier"/>
+              </a:rPr>
+              <a:t>Resolver : conf 1.05 (probe post-deploy)</a:t>
+            </a:r>
+            <a:r>
+              <a:rPr/>
+              <a:t> </a:t>
+            </a:r>
+            <a:r>
+              <a:rPr>
+                <a:latin typeface="Courier"/>
+              </a:rPr>
+              <a:t>Status : [PASS post-deploy]</a:t>
+            </a:r>
+            <a:r>
+              <a:rPr/>
+              <a:t> — action vague-1.5 confirmée déployée</a:t>
+            </a:r>
+          </a:p>
+        </p:txBody>
+      </p:sp>
+      <p:pic>
+        <p:nvPicPr>
+          <p:cNvPr descr="status-screenshots/2026-05-25-postdeploy/16-aya-port-webcam.png" id="0" name="Picture 1"/>
+          <p:cNvPicPr>
+            <a:picLocks noGrp="1" noChangeAspect="1"/>
+          </p:cNvPicPr>
+          <p:nvPr/>
+        </p:nvPicPr>
+        <p:blipFill>
+          <a:blip r:embed="rId2"/>
+          <a:stretch>
+            <a:fillRect/>
+          </a:stretch>
+        </p:blipFill>
+        <p:spPr bwMode="auto">
+          <a:xfrm>
+            <a:off x="3568700" y="406400"/>
+            <a:ext cx="5105400" cy="3467100"/>
+          </a:xfrm>
+          <a:prstGeom prst="rect">
+            <a:avLst/>
+          </a:prstGeom>
+          <a:noFill/>
+          <a:ln w="9525">
+            <a:noFill/>
+            <a:headEnd/>
+            <a:tailEnd/>
+          </a:ln>
+        </p:spPr>
+      </p:pic>
+      <p:sp>
+        <p:nvSpPr>
+          <p:cNvPr id="1" name="TextBox 3"/>
+          <p:cNvSpPr txBox="1"/>
+          <p:nvPr>
+            <p:ph idx="1"/>
+          </p:nvPr>
+        </p:nvSpPr>
+        <p:spPr>
+          <a:xfrm>
+            <a:off x="3568700" y="4076700"/>
+            <a:ext cx="5105400" cy="508000"/>
+          </a:xfrm>
+          <a:prstGeom prst="rect">
+            <a:avLst/>
+          </a:prstGeom>
+          <a:noFill/>
+        </p:spPr>
+        <p:txBody>
+          <a:bodyPr/>
+          <a:lstStyle/>
+          <a:p>
+            <a:pPr lvl="0" indent="0" marL="0" algn="ctr">
+              <a:buNone/>
+            </a:pPr>
+            <a:r>
+              <a:rPr/>
+              <a:t>Mission Control · Maritime / douanes — Port d’Abidjan Vridi + brief opérationnel Nord 72 % (post-deploy)</a:t>
+            </a:r>
+          </a:p>
+        </p:txBody>
+      </p:sp>
+    </p:spTree>
+  </p:cSld>
+</p:sld>
+</file>
+
+<file path=ppt/slides/slide17.xml><?xml version="1.0" encoding="utf-8"?>
+<p:sld xmlns:a="http://schemas.openxmlformats.org/drawingml/2006/main" xmlns:r="http://schemas.openxmlformats.org/officeDocument/2006/relationships" xmlns:p="http://schemas.openxmlformats.org/presentationml/2006/main">
+  <p:cSld>
+    <p:spTree>
+      <p:nvGrpSpPr>
+        <p:cNvPr id="1" name=""/>
+        <p:cNvGrpSpPr/>
+        <p:nvPr/>
+      </p:nvGrpSpPr>
+      <p:grpSpPr>
+        <a:xfrm>
+          <a:off x="0" y="0"/>
+          <a:ext cx="0" cy="0"/>
+          <a:chOff x="0" y="0"/>
+          <a:chExt cx="0" cy="0"/>
+        </a:xfrm>
+      </p:grpSpPr>
+      <p:sp>
+        <p:nvSpPr>
+          <p:cNvPr id="2" name="Title 1"/>
+          <p:cNvSpPr>
+            <a:spLocks noGrp="1"/>
+          </p:cNvSpPr>
+          <p:nvPr>
+            <p:ph type="title"/>
+          </p:nvPr>
+        </p:nvSpPr>
+        <p:spPr>
+          <a:xfrm>
+            <a:off x="457201" y="204787"/>
+            <a:ext cx="3008313" cy="871538"/>
+          </a:xfrm>
+        </p:spPr>
+        <p:txBody>
+          <a:bodyPr/>
+          <a:lstStyle/>
+          <a:p>
+            <a:pPr lvl="0" indent="0" marL="0">
+              <a:buNone/>
+            </a:pPr>
+            <a:r>
+              <a:rPr/>
+              <a:t>S1.6 · Mail dérogation douanière</a:t>
+            </a:r>
+          </a:p>
+        </p:txBody>
+      </p:sp>
+      <p:sp>
+        <p:nvSpPr>
+          <p:cNvPr id="4" name="Text Placeholder 3"/>
+          <p:cNvSpPr>
+            <a:spLocks noGrp="1"/>
+          </p:cNvSpPr>
+          <p:nvPr>
+            <p:ph idx="2" sz="half" type="body"/>
+          </p:nvPr>
+        </p:nvSpPr>
+        <p:spPr/>
+        <p:txBody>
+          <a:bodyPr/>
+          <a:lstStyle/>
+          <a:p>
+            <a:pPr lvl="0" indent="0" marL="0">
+              <a:buNone/>
+            </a:pPr>
+            <a:r>
+              <a:rPr b="1"/>
+              <a:t>Phrase AYA</a:t>
+            </a:r>
+            <a:r>
+              <a:rPr/>
+              <a:t> : </a:t>
+            </a:r>
+            <a:r>
+              <a:rPr>
+                <a:latin typeface="Courier"/>
+              </a:rPr>
+              <a:t>AYA, rédige le courrier de dédouanement pour Atlantic Trader.</a:t>
+            </a:r>
+          </a:p>
+          <a:p>
+            <a:pPr lvl="0" indent="0" marL="0">
+              <a:buNone/>
+            </a:pPr>
+            <a:r>
+              <a:rPr b="1"/>
+              <a:t>Plan B clic</a:t>
+            </a:r>
+            <a:r>
+              <a:rPr/>
+              <a:t> : Drawer PV douanes → bouton </a:t>
+            </a:r>
+            <a:r>
+              <a:rPr b="1"/>
+              <a:t>Préparer email dérogation</a:t>
+            </a:r>
+            <a:r>
+              <a:rPr/>
+              <a:t> (proposal </a:t>
+            </a:r>
+            <a:r>
+              <a:rPr>
+                <a:latin typeface="Courier"/>
+              </a:rPr>
+              <a:t>propose-customs-derogation</a:t>
+            </a:r>
+            <a:r>
+              <a:rPr/>
+              <a:t>).</a:t>
+            </a:r>
+          </a:p>
+          <a:p>
+            <a:pPr lvl="0" indent="0" marL="0">
+              <a:buNone/>
+            </a:pPr>
+            <a:r>
+              <a:rPr b="1"/>
+              <a:t>Effet attendu</a:t>
+            </a:r>
+            <a:r>
+              <a:rPr/>
+              <a:t> : - Drawer email </a:t>
+            </a:r>
+            <a:r>
+              <a:rPr>
+                <a:latin typeface="Courier"/>
+              </a:rPr>
+              <a:t>customs_derogation</a:t>
+            </a:r>
+            <a:r>
+              <a:rPr/>
+              <a:t> · advisory-only - Destinataire : Direction Générale des Douanes (DGD Abidjan) - Corps pré-rédigé : distingue cargo drones ≠ lot non conforme · cite Abidjan.net + PV 18/05 - Bandeau </a:t>
+            </a:r>
+            <a:r>
+              <a:rPr b="1"/>
+              <a:t>« Proposition Cabinet — aucun envoi automatique »</a:t>
+            </a:r>
+          </a:p>
+          <a:p>
+            <a:pPr lvl="0" indent="0" marL="0">
+              <a:buNone/>
+            </a:pPr>
+            <a:r>
+              <a:rPr>
+                <a:latin typeface="Courier"/>
+              </a:rPr>
+              <a:t>Action : aya.draft_customs_email</a:t>
+            </a:r>
+            <a:r>
+              <a:rPr/>
+              <a:t> </a:t>
+            </a:r>
+            <a:r>
+              <a:rPr>
+                <a:latin typeface="Courier"/>
+              </a:rPr>
+              <a:t>Resolver : conf 0.94 (probe post-deploy)</a:t>
+            </a:r>
+            <a:r>
+              <a:rPr/>
+              <a:t> </a:t>
+            </a:r>
+            <a:r>
+              <a:rPr>
+                <a:latin typeface="Courier"/>
+              </a:rPr>
+              <a:t>Status : [PASS post-deploy]</a:t>
+            </a:r>
+          </a:p>
+        </p:txBody>
+      </p:sp>
+      <p:pic>
+        <p:nvPicPr>
+          <p:cNvPr descr="status-screenshots/2026-05-25-postdeploy/18-aya-mail-derogation.png" id="0" name="Picture 1"/>
           <p:cNvPicPr>
             <a:picLocks noGrp="1" noChangeAspect="1"/>
           </p:cNvPicPr>
@@ -4329,290 +4803,7 @@
             </a:pPr>
             <a:r>
               <a:rPr/>
-              <a:t>Carte cockpit · 16 NAVIRES AIS · ABIDJAN / VRIDI</a:t>
-            </a:r>
-          </a:p>
-        </p:txBody>
-      </p:sp>
-    </p:spTree>
-  </p:cSld>
-</p:sld>
-</file>
-
-<file path=ppt/slides/slide16.xml><?xml version="1.0" encoding="utf-8"?>
-<p:sld xmlns:a="http://schemas.openxmlformats.org/drawingml/2006/main" xmlns:r="http://schemas.openxmlformats.org/officeDocument/2006/relationships" xmlns:p="http://schemas.openxmlformats.org/presentationml/2006/main">
-  <p:cSld>
-    <p:spTree>
-      <p:nvGrpSpPr>
-        <p:cNvPr id="1" name=""/>
-        <p:cNvGrpSpPr/>
-        <p:nvPr/>
-      </p:nvGrpSpPr>
-      <p:grpSpPr>
-        <a:xfrm>
-          <a:off x="0" y="0"/>
-          <a:ext cx="0" cy="0"/>
-          <a:chOff x="0" y="0"/>
-          <a:chExt cx="0" cy="0"/>
-        </a:xfrm>
-      </p:grpSpPr>
-      <p:sp>
-        <p:nvSpPr>
-          <p:cNvPr id="2" name="Title 1"/>
-          <p:cNvSpPr>
-            <a:spLocks noGrp="1"/>
-          </p:cNvSpPr>
-          <p:nvPr>
-            <p:ph type="title"/>
-          </p:nvPr>
-        </p:nvSpPr>
-        <p:spPr>
-          <a:xfrm>
-            <a:off x="457201" y="204787"/>
-            <a:ext cx="3008313" cy="871538"/>
-          </a:xfrm>
-        </p:spPr>
-        <p:txBody>
-          <a:bodyPr/>
-          <a:lstStyle/>
-          <a:p>
-            <a:pPr lvl="0" indent="0" marL="0">
-              <a:buNone/>
-            </a:pPr>
-            <a:r>
-              <a:rPr/>
-              <a:t>S1.5 · Situation au port (vue d’ensemble maritime)</a:t>
-            </a:r>
-          </a:p>
-        </p:txBody>
-      </p:sp>
-      <p:sp>
-        <p:nvSpPr>
-          <p:cNvPr id="4" name="Text Placeholder 3"/>
-          <p:cNvSpPr>
-            <a:spLocks noGrp="1"/>
-          </p:cNvSpPr>
-          <p:nvPr>
-            <p:ph idx="2" sz="half" type="body"/>
-          </p:nvPr>
-        </p:nvSpPr>
-        <p:spPr/>
-        <p:txBody>
-          <a:bodyPr/>
-          <a:lstStyle/>
-          <a:p>
-            <a:pPr lvl="0" indent="0" marL="0">
-              <a:buNone/>
-            </a:pPr>
-            <a:r>
-              <a:rPr b="1"/>
-              <a:t>Phrase AYA</a:t>
-            </a:r>
-            <a:r>
-              <a:rPr/>
-              <a:t> : </a:t>
-            </a:r>
-            <a:r>
-              <a:rPr>
-                <a:latin typeface="Courier"/>
-              </a:rPr>
-              <a:t>AYA, montre la situation au port.</a:t>
-            </a:r>
-            <a:r>
-              <a:rPr/>
-              <a:t> </a:t>
-            </a:r>
-            <a:r>
-              <a:rPr i="1"/>
-              <a:t>(action nouvelle — commit </a:t>
-            </a:r>
-            <a:r>
-              <a:rPr i="1">
-                <a:latin typeface="Courier"/>
-              </a:rPr>
-              <a:t>6335d460</a:t>
-            </a:r>
-            <a:r>
-              <a:rPr i="1"/>
-              <a:t>)</a:t>
-            </a:r>
-          </a:p>
-          <a:p>
-            <a:pPr lvl="0" indent="0" marL="0">
-              <a:buNone/>
-            </a:pPr>
-            <a:r>
-              <a:rPr b="1"/>
-              <a:t>Plan B clic</a:t>
-            </a:r>
-            <a:r>
-              <a:rPr/>
-              <a:t> : Stratégie → bouton </a:t>
-            </a:r>
-            <a:r>
-              <a:rPr b="1"/>
-              <a:t>Mode live · Maritime</a:t>
-            </a:r>
-            <a:r>
-              <a:rPr/>
-              <a:t> → grille webcams + panel AIS Vridi.</a:t>
-            </a:r>
-          </a:p>
-          <a:p>
-            <a:pPr lvl="0" indent="0" marL="0">
-              <a:buNone/>
-            </a:pPr>
-            <a:r>
-              <a:rPr b="1"/>
-              <a:t>Effet attendu</a:t>
-            </a:r>
-            <a:r>
-              <a:rPr/>
-              <a:t> : - Vue port Abidjan (map zoomée Vridi) - Panel maritime ouvert · liste 16 navires - Webcam APM Apapa en tête de la grille</a:t>
-            </a:r>
-          </a:p>
-          <a:p>
-            <a:pPr lvl="0" indent="0" marL="0">
-              <a:buNone/>
-            </a:pPr>
-            <a:r>
-              <a:rPr>
-                <a:latin typeface="Courier"/>
-              </a:rPr>
-              <a:t>Action : aya.show_maritime_traffic</a:t>
-            </a:r>
-            <a:r>
-              <a:rPr/>
-              <a:t> </a:t>
-            </a:r>
-            <a:r>
-              <a:rPr>
-                <a:latin typeface="Courier"/>
-              </a:rPr>
-              <a:t>Resolver : conf 1.05 (probe post-deploy)</a:t>
-            </a:r>
-            <a:r>
-              <a:rPr/>
-              <a:t> </a:t>
-            </a:r>
-            <a:r>
-              <a:rPr>
-                <a:latin typeface="Courier"/>
-              </a:rPr>
-              <a:t>Status : [PASS post-deploy]</a:t>
-            </a:r>
-            <a:r>
-              <a:rPr/>
-              <a:t> — action vague-1.5 confirmée déployée</a:t>
-            </a:r>
-          </a:p>
-        </p:txBody>
-      </p:sp>
-      <p:pic>
-        <p:nvPicPr>
-          <p:cNvPr descr="status-screenshots/2026-05-25-demo-eve/12-flux-terrain-webcams.png" id="0" name="Picture 1"/>
-          <p:cNvPicPr>
-            <a:picLocks noGrp="1" noChangeAspect="1"/>
-          </p:cNvPicPr>
-          <p:nvPr/>
-        </p:nvPicPr>
-        <p:blipFill>
-          <a:blip r:embed="rId2"/>
-          <a:stretch>
-            <a:fillRect/>
-          </a:stretch>
-        </p:blipFill>
-        <p:spPr bwMode="auto">
-          <a:xfrm>
-            <a:off x="3568700" y="317500"/>
-            <a:ext cx="5105400" cy="3644900"/>
-          </a:xfrm>
-          <a:prstGeom prst="rect">
-            <a:avLst/>
-          </a:prstGeom>
-          <a:noFill/>
-          <a:ln w="9525">
-            <a:noFill/>
-            <a:headEnd/>
-            <a:tailEnd/>
-          </a:ln>
-        </p:spPr>
-      </p:pic>
-      <p:sp>
-        <p:nvSpPr>
-          <p:cNvPr id="1" name="TextBox 3"/>
-          <p:cNvSpPr txBox="1"/>
-          <p:nvPr>
-            <p:ph idx="1"/>
-          </p:nvPr>
-        </p:nvSpPr>
-        <p:spPr>
-          <a:xfrm>
-            <a:off x="3568700" y="4076700"/>
-            <a:ext cx="5105400" cy="508000"/>
-          </a:xfrm>
-          <a:prstGeom prst="rect">
-            <a:avLst/>
-          </a:prstGeom>
-          <a:noFill/>
-        </p:spPr>
-        <p:txBody>
-          <a:bodyPr/>
-          <a:lstStyle/>
-          <a:p>
-            <a:pPr lvl="0" indent="0" marL="0" algn="ctr">
-              <a:buNone/>
-            </a:pPr>
-            <a:r>
-              <a:rPr/>
-              <a:t>FLUX TERRAIN · grille webcams Mission Control</a:t>
-            </a:r>
-          </a:p>
-        </p:txBody>
-      </p:sp>
-    </p:spTree>
-  </p:cSld>
-</p:sld>
-</file>
-
-<file path=ppt/slides/slide17.xml><?xml version="1.0" encoding="utf-8"?>
-<p:sld xmlns:a="http://schemas.openxmlformats.org/drawingml/2006/main" xmlns:r="http://schemas.openxmlformats.org/officeDocument/2006/relationships" xmlns:p="http://schemas.openxmlformats.org/presentationml/2006/main">
-  <p:cSld>
-    <p:spTree>
-      <p:nvGrpSpPr>
-        <p:cNvPr id="1" name=""/>
-        <p:cNvGrpSpPr/>
-        <p:nvPr/>
-      </p:nvGrpSpPr>
-      <p:grpSpPr>
-        <a:xfrm>
-          <a:off x="0" y="0"/>
-          <a:ext cx="0" cy="0"/>
-          <a:chOff x="0" y="0"/>
-          <a:chExt cx="0" cy="0"/>
-        </a:xfrm>
-      </p:grpSpPr>
-      <p:sp>
-        <p:nvSpPr>
-          <p:cNvPr id="2" name="Title 1"/>
-          <p:cNvSpPr>
-            <a:spLocks noGrp="1"/>
-          </p:cNvSpPr>
-          <p:nvPr>
-            <p:ph type="title"/>
-          </p:nvPr>
-        </p:nvSpPr>
-        <p:spPr/>
-        <p:txBody>
-          <a:bodyPr/>
-          <a:lstStyle/>
-          <a:p>
-            <a:pPr lvl="0" indent="0" marL="0">
-              <a:buNone/>
-            </a:pPr>
-            <a:r>
-              <a:rPr/>
-              <a:t>S1.6 · Mail dérogation douanière</a:t>
+              <a:t>AYA · brouillon mail dérogation douanière (reasoning trail visible, structure « Objet · Monsieur/Madame le Chef des Douanes »)</a:t>
             </a:r>
           </a:p>
         </p:txBody>
@@ -4632,111 +4823,22 @@
           <a:bodyPr/>
           <a:lstStyle/>
           <a:p>
-            <a:pPr lvl="0" indent="0" marL="0">
+            <a:pPr lvl="0" indent="0" marL="1270000">
               <a:buNone/>
             </a:pPr>
             <a:r>
-              <a:rPr b="1"/>
-              <a:t>Phrase AYA</a:t>
-            </a:r>
-            <a:r>
-              <a:rPr/>
-              <a:t> : </a:t>
-            </a:r>
-            <a:r>
-              <a:rPr>
-                <a:latin typeface="Courier"/>
-              </a:rPr>
-              <a:t>AYA, rédige le courrier de dédouanement pour Atlantic Trader.</a:t>
-            </a:r>
-          </a:p>
-          <a:p>
-            <a:pPr lvl="0" indent="0" marL="0">
-              <a:buNone/>
-            </a:pPr>
-            <a:r>
-              <a:rPr b="1"/>
-              <a:t>Plan B clic</a:t>
-            </a:r>
-            <a:r>
-              <a:rPr/>
-              <a:t> : Drawer PV douanes → bouton </a:t>
-            </a:r>
-            <a:r>
-              <a:rPr b="1"/>
-              <a:t>Préparer email dérogation</a:t>
-            </a:r>
-            <a:r>
-              <a:rPr/>
-              <a:t> (proposal </a:t>
-            </a:r>
-            <a:r>
-              <a:rPr>
-                <a:latin typeface="Courier"/>
-              </a:rPr>
-              <a:t>propose-customs-derogation</a:t>
-            </a:r>
-            <a:r>
-              <a:rPr/>
-              <a:t>).</a:t>
-            </a:r>
-          </a:p>
-          <a:p>
-            <a:pPr lvl="0" indent="0" marL="0">
-              <a:buNone/>
-            </a:pPr>
-            <a:r>
-              <a:rPr b="1"/>
-              <a:t>Effet attendu</a:t>
-            </a:r>
-            <a:r>
-              <a:rPr/>
-              <a:t> : - Drawer email </a:t>
-            </a:r>
-            <a:r>
-              <a:rPr>
+              <a:rPr sz="2000" i="1"/>
+              <a:t>Légende : capture post-deploy — AYA streame le brouillon advisory (structure formelle, citations à compléter par le Cabinet). Drawer email dédié </a:t>
+            </a:r>
+            <a:r>
+              <a:rPr sz="2000" i="1">
                 <a:latin typeface="Courier"/>
               </a:rPr>
               <a:t>customs_derogation</a:t>
             </a:r>
             <a:r>
-              <a:rPr/>
-              <a:t> · advisory-only - Destinataire : Direction Générale des Douanes (DGD Abidjan) - Corps pré-rédigé : distingue cargo drones ≠ lot non conforme · cite Abidjan.net + PV 18/05 - Bandeau </a:t>
-            </a:r>
-            <a:r>
-              <a:rPr b="1"/>
-              <a:t>« Proposition Cabinet — aucun envoi automatique »</a:t>
-            </a:r>
-          </a:p>
-          <a:p>
-            <a:pPr lvl="0" indent="0" marL="0">
-              <a:buNone/>
-            </a:pPr>
-            <a:r>
-              <a:rPr>
-                <a:latin typeface="Courier"/>
-              </a:rPr>
-              <a:t>Action : aya.draft_customs_email</a:t>
-            </a:r>
-            <a:r>
-              <a:rPr/>
-              <a:t> </a:t>
-            </a:r>
-            <a:r>
-              <a:rPr>
-                <a:latin typeface="Courier"/>
-              </a:rPr>
-              <a:t>Resolver : conf 0.94 (probe post-deploy)</a:t>
-            </a:r>
-            <a:r>
-              <a:rPr/>
-              <a:t> </a:t>
-            </a:r>
-            <a:r>
-              <a:rPr>
-                <a:latin typeface="Courier"/>
-              </a:rPr>
-              <a:t>Status : [PASS post-deploy]</a:t>
+              <a:rPr sz="2000" i="1"/>
+              <a:t> activable via le bouton « Préparer email dérogation » du drawer PV (plan B clic).</a:t>
             </a:r>
           </a:p>
         </p:txBody>
@@ -6608,7 +6710,12 @@
             <p:ph type="title"/>
           </p:nvPr>
         </p:nvSpPr>
-        <p:spPr/>
+        <p:spPr>
+          <a:xfrm>
+            <a:off x="457201" y="204787"/>
+            <a:ext cx="3008313" cy="871538"/>
+          </a:xfrm>
+        </p:spPr>
         <p:txBody>
           <a:bodyPr/>
           <a:lstStyle/>
@@ -6625,12 +6732,12 @@
       </p:sp>
       <p:sp>
         <p:nvSpPr>
-          <p:cNvPr id="3" name="Content Placeholder 2"/>
+          <p:cNvPr id="4" name="Text Placeholder 3"/>
           <p:cNvSpPr>
             <a:spLocks noGrp="1"/>
           </p:cNvSpPr>
           <p:nvPr>
-            <p:ph idx="1"/>
+            <p:ph idx="2" sz="half" type="body"/>
           </p:nvPr>
         </p:nvSpPr>
         <p:spPr/>
@@ -6786,6 +6893,68 @@
             <a:r>
               <a:rPr sz="2000" i="1"/>
               <a:t>, pas le rapport préfet de 70 p. Aligner la phrase de présentation : « rapport de diversification cacao prêt pour validation advisory ».</a:t>
+            </a:r>
+          </a:p>
+        </p:txBody>
+      </p:sp>
+      <p:pic>
+        <p:nvPicPr>
+          <p:cNvPr descr="status-screenshots/2026-05-25-postdeploy/20-aya-rapport-strategique.png" id="0" name="Picture 1"/>
+          <p:cNvPicPr>
+            <a:picLocks noGrp="1" noChangeAspect="1"/>
+          </p:cNvPicPr>
+          <p:nvPr/>
+        </p:nvPicPr>
+        <p:blipFill>
+          <a:blip r:embed="rId2"/>
+          <a:stretch>
+            <a:fillRect/>
+          </a:stretch>
+        </p:blipFill>
+        <p:spPr bwMode="auto">
+          <a:xfrm>
+            <a:off x="3568700" y="635000"/>
+            <a:ext cx="5105400" cy="3009900"/>
+          </a:xfrm>
+          <a:prstGeom prst="rect">
+            <a:avLst/>
+          </a:prstGeom>
+          <a:noFill/>
+          <a:ln w="9525">
+            <a:noFill/>
+            <a:headEnd/>
+            <a:tailEnd/>
+          </a:ln>
+        </p:spPr>
+      </p:pic>
+      <p:sp>
+        <p:nvSpPr>
+          <p:cNvPr id="1" name="TextBox 3"/>
+          <p:cNvSpPr txBox="1"/>
+          <p:nvPr>
+            <p:ph idx="1"/>
+          </p:nvPr>
+        </p:nvSpPr>
+        <p:spPr>
+          <a:xfrm>
+            <a:off x="3568700" y="4076700"/>
+            <a:ext cx="5105400" cy="508000"/>
+          </a:xfrm>
+          <a:prstGeom prst="rect">
+            <a:avLst/>
+          </a:prstGeom>
+          <a:noFill/>
+        </p:spPr>
+        <p:txBody>
+          <a:bodyPr/>
+          <a:lstStyle/>
+          <a:p>
+            <a:pPr lvl="0" indent="0" marL="0" algn="ctr">
+              <a:buNone/>
+            </a:pPr>
+            <a:r>
+              <a:rPr/>
+              <a:t>Page décisions · package cacao-diversification — 3 arbitrages matin · barres comparaison option terrain · bandeau « Brouillon advisory »</a:t>
             </a:r>
           </a:p>
         </p:txBody>
@@ -6822,7 +6991,12 @@
             <p:ph type="title"/>
           </p:nvPr>
         </p:nvSpPr>
-        <p:spPr/>
+        <p:spPr>
+          <a:xfrm>
+            <a:off x="457201" y="204787"/>
+            <a:ext cx="3008313" cy="871538"/>
+          </a:xfrm>
+        </p:spPr>
         <p:txBody>
           <a:bodyPr/>
           <a:lstStyle/>
@@ -6839,12 +7013,12 @@
       </p:sp>
       <p:sp>
         <p:nvSpPr>
-          <p:cNvPr id="3" name="Content Placeholder 2"/>
+          <p:cNvPr id="4" name="Text Placeholder 3"/>
           <p:cNvSpPr>
             <a:spLocks noGrp="1"/>
           </p:cNvSpPr>
           <p:nvPr>
-            <p:ph idx="1"/>
+            <p:ph idx="2" sz="half" type="body"/>
           </p:nvPr>
         </p:nvSpPr>
         <p:spPr/>
@@ -7025,6 +7199,68 @@
                 <a:latin typeface="Courier"/>
               </a:rPr>
               <a:t>Status : [PASS post-deploy]</a:t>
+            </a:r>
+          </a:p>
+        </p:txBody>
+      </p:sp>
+      <p:pic>
+        <p:nvPicPr>
+          <p:cNvPr descr="status-screenshots/2026-05-25-postdeploy/21-aya-odj-cacao.png" id="0" name="Picture 1"/>
+          <p:cNvPicPr>
+            <a:picLocks noGrp="1" noChangeAspect="1"/>
+          </p:cNvPicPr>
+          <p:nvPr/>
+        </p:nvPicPr>
+        <p:blipFill>
+          <a:blip r:embed="rId2"/>
+          <a:stretch>
+            <a:fillRect/>
+          </a:stretch>
+        </p:blipFill>
+        <p:spPr bwMode="auto">
+          <a:xfrm>
+            <a:off x="3568700" y="635000"/>
+            <a:ext cx="5105400" cy="2997200"/>
+          </a:xfrm>
+          <a:prstGeom prst="rect">
+            <a:avLst/>
+          </a:prstGeom>
+          <a:noFill/>
+          <a:ln w="9525">
+            <a:noFill/>
+            <a:headEnd/>
+            <a:tailEnd/>
+          </a:ln>
+        </p:spPr>
+      </p:pic>
+      <p:sp>
+        <p:nvSpPr>
+          <p:cNvPr id="1" name="TextBox 3"/>
+          <p:cNvSpPr txBox="1"/>
+          <p:nvPr>
+            <p:ph idx="1"/>
+          </p:nvPr>
+        </p:nvSpPr>
+        <p:spPr>
+          <a:xfrm>
+            <a:off x="3568700" y="4076700"/>
+            <a:ext cx="5105400" cy="508000"/>
+          </a:xfrm>
+          <a:prstGeom prst="rect">
+            <a:avLst/>
+          </a:prstGeom>
+          <a:noFill/>
+        </p:spPr>
+        <p:txBody>
+          <a:bodyPr/>
+          <a:lstStyle/>
+          <a:p>
+            <a:pPr lvl="0" indent="0" marL="0" algn="ctr">
+              <a:buNone/>
+            </a:pPr>
+            <a:r>
+              <a:rPr/>
+              <a:t>Meeting Préfet Nawa · chrono live · form « Proposer un point ODJ » (placeholder « Point cacao - diversification anacarde ») prêt à recevoir la proposition AYA</a:t>
             </a:r>
           </a:p>
         </p:txBody>

--- a/docs/sentinel-ci-demo-deck-2026-05-25.pptx
+++ b/docs/sentinel-ci-demo-deck-2026-05-25.pptx
@@ -3176,7 +3176,7 @@
                 </a:solidFill>
                 <a:latin typeface="Calibri"/>
               </a:rPr>
-              <a:t>SENTINEL-CI · Démo Vice-Président</a:t>
+              <a:t>SENTINEL-CI · Démo Vice Premier Ministre</a:t>
             </a:r>
           </a:p>
         </p:txBody>
@@ -3473,7 +3473,7 @@
                 </a:solidFill>
                 <a:latin typeface="Calibri"/>
               </a:rPr>
-              <a:t>SENTINEL-CI · Démo VP · 25 mai 2026</a:t>
+              <a:t>SENTINEL-CI · Démo Vice Premier Ministre · 25 mai 2026</a:t>
             </a:r>
           </a:p>
         </p:txBody>
@@ -3664,7 +3664,7 @@
                 </a:solidFill>
                 <a:latin typeface="Calibri"/>
               </a:rPr>
-              <a:t>SENTINEL-CI · Démo VP · 25 mai 2026</a:t>
+              <a:t>SENTINEL-CI · Démo Vice Premier Ministre · 25 mai 2026</a:t>
             </a:r>
           </a:p>
         </p:txBody>
@@ -4035,7 +4035,7 @@
                 </a:solidFill>
                 <a:latin typeface="Calibri"/>
               </a:rPr>
-              <a:t>SENTINEL-CI · Démo VP · 25 mai 2026</a:t>
+              <a:t>SENTINEL-CI · Démo Vice Premier Ministre · 25 mai 2026</a:t>
             </a:r>
           </a:p>
         </p:txBody>
@@ -4594,7 +4594,7 @@
                 </a:solidFill>
                 <a:latin typeface="Calibri"/>
               </a:rPr>
-              <a:t>SENTINEL-CI · Démo VP · 25 mai 2026</a:t>
+              <a:t>SENTINEL-CI · Démo Vice Premier Ministre · 25 mai 2026</a:t>
             </a:r>
           </a:p>
         </p:txBody>
@@ -5037,7 +5037,7 @@
                 </a:solidFill>
                 <a:latin typeface="Calibri"/>
               </a:rPr>
-              <a:t>SENTINEL-CI · Démo VP · 25 mai 2026</a:t>
+              <a:t>SENTINEL-CI · Démo Vice Premier Ministre · 25 mai 2026</a:t>
             </a:r>
           </a:p>
         </p:txBody>
@@ -5615,7 +5615,7 @@
                 </a:solidFill>
                 <a:latin typeface="Calibri"/>
               </a:rPr>
-              <a:t>SENTINEL-CI · Démo VP · 25 mai 2026</a:t>
+              <a:t>SENTINEL-CI · Démo Vice Premier Ministre · 25 mai 2026</a:t>
             </a:r>
           </a:p>
         </p:txBody>
@@ -6067,7 +6067,7 @@
                 </a:solidFill>
                 <a:latin typeface="Calibri"/>
               </a:rPr>
-              <a:t>SENTINEL-CI · Démo VP · 25 mai 2026</a:t>
+              <a:t>SENTINEL-CI · Démo Vice Premier Ministre · 25 mai 2026</a:t>
             </a:r>
           </a:p>
         </p:txBody>
@@ -6572,7 +6572,7 @@
                 </a:solidFill>
                 <a:latin typeface="Calibri"/>
               </a:rPr>
-              <a:t>SENTINEL-CI · Démo VP · 25 mai 2026</a:t>
+              <a:t>SENTINEL-CI · Démo Vice Premier Ministre · 25 mai 2026</a:t>
             </a:r>
           </a:p>
         </p:txBody>
@@ -8548,7 +8548,7 @@
                 </a:solidFill>
                 <a:latin typeface="Calibri"/>
               </a:rPr>
-              <a:t>SENTINEL-CI · Démo VP · 25 mai 2026</a:t>
+              <a:t>SENTINEL-CI · Démo Vice Premier Ministre · 25 mai 2026</a:t>
             </a:r>
           </a:p>
         </p:txBody>
@@ -8735,7 +8735,7 @@
                 </a:solidFill>
                 <a:latin typeface="Calibri"/>
               </a:rPr>
-              <a:t>SENTINEL-CI · Démo VP · 25 mai 2026</a:t>
+              <a:t>SENTINEL-CI · Démo Vice Premier Ministre · 25 mai 2026</a:t>
             </a:r>
           </a:p>
         </p:txBody>
@@ -8835,7 +8835,7 @@
                 </a:solidFill>
                 <a:latin typeface="Calibri"/>
               </a:rPr>
-              <a:t>SENTINEL-CI · Démo Vice-Président</a:t>
+              <a:t>SENTINEL-CI · Démo Vice Premier Ministre</a:t>
             </a:r>
           </a:p>
         </p:txBody>
@@ -8913,7 +8913,7 @@
                 </a:solidFill>
                 <a:latin typeface="Calibri"/>
               </a:rPr>
-              <a:t>SENTINEL-CI · Démo VP · 25 mai 2026</a:t>
+              <a:t>SENTINEL-CI · Démo Vice Premier Ministre · 25 mai 2026</a:t>
             </a:r>
           </a:p>
         </p:txBody>
@@ -9091,7 +9091,7 @@
                 </a:solidFill>
                 <a:latin typeface="Calibri"/>
               </a:rPr>
-              <a:t>SENTINEL-CI · Démo VP · 25 mai 2026</a:t>
+              <a:t>SENTINEL-CI · Démo Vice Premier Ministre · 25 mai 2026</a:t>
             </a:r>
           </a:p>
         </p:txBody>
@@ -9570,7 +9570,7 @@
                 </a:solidFill>
                 <a:latin typeface="Calibri"/>
               </a:rPr>
-              <a:t>SENTINEL-CI · Démo VP · 25 mai 2026</a:t>
+              <a:t>SENTINEL-CI · Démo Vice Premier Ministre · 25 mai 2026</a:t>
             </a:r>
           </a:p>
         </p:txBody>
@@ -9748,7 +9748,7 @@
                 </a:solidFill>
                 <a:latin typeface="Calibri"/>
               </a:rPr>
-              <a:t>SENTINEL-CI · Démo VP · 25 mai 2026</a:t>
+              <a:t>SENTINEL-CI · Démo Vice Premier Ministre · 25 mai 2026</a:t>
             </a:r>
           </a:p>
         </p:txBody>
@@ -9861,7 +9861,7 @@
                 </a:solidFill>
                 <a:latin typeface="Calibri"/>
               </a:rPr>
-              <a:t> · le VP prépare l’arbitrage avant la rencontre du Préfet de Nawa à Soubré (11h00).</a:t>
+              <a:t> · le Vice Premier Ministre prépare l’arbitrage avant la rencontre du Préfet de Nawa à Soubré (11h00).</a:t>
             </a:r>
           </a:p>
         </p:txBody>
@@ -9939,7 +9939,7 @@
                 </a:solidFill>
                 <a:latin typeface="Calibri"/>
               </a:rPr>
-              <a:t>SENTINEL-CI · Démo VP · 25 mai 2026</a:t>
+              <a:t>SENTINEL-CI · Démo Vice Premier Ministre · 25 mai 2026</a:t>
             </a:r>
           </a:p>
         </p:txBody>
@@ -10319,7 +10319,7 @@
                 </a:solidFill>
                 <a:latin typeface="Calibri"/>
               </a:rPr>
-              <a:t>SENTINEL-CI · Démo VP · 25 mai 2026</a:t>
+              <a:t>SENTINEL-CI · Démo Vice Premier Ministre · 25 mai 2026</a:t>
             </a:r>
           </a:p>
         </p:txBody>
@@ -10834,7 +10834,7 @@
                 </a:solidFill>
                 <a:latin typeface="Calibri"/>
               </a:rPr>
-              <a:t>SENTINEL-CI · Démo VP · 25 mai 2026</a:t>
+              <a:t>SENTINEL-CI · Démo Vice Premier Ministre · 25 mai 2026</a:t>
             </a:r>
           </a:p>
         </p:txBody>
@@ -11286,7 +11286,7 @@
                 </a:solidFill>
                 <a:latin typeface="Calibri"/>
               </a:rPr>
-              <a:t>SENTINEL-CI · Démo VP · 25 mai 2026</a:t>
+              <a:t>SENTINEL-CI · Démo Vice Premier Ministre · 25 mai 2026</a:t>
             </a:r>
           </a:p>
         </p:txBody>
@@ -11815,7 +11815,7 @@
                 </a:solidFill>
                 <a:latin typeface="Calibri"/>
               </a:rPr>
-              <a:t>SENTINEL-CI · Démo VP · 25 mai 2026</a:t>
+              <a:t>SENTINEL-CI · Démo Vice Premier Ministre · 25 mai 2026</a:t>
             </a:r>
           </a:p>
         </p:txBody>
@@ -12402,7 +12402,7 @@
                 </a:solidFill>
                 <a:latin typeface="Calibri"/>
               </a:rPr>
-              <a:t>SENTINEL-CI · Démo VP · 25 mai 2026</a:t>
+              <a:t>SENTINEL-CI · Démo Vice Premier Ministre · 25 mai 2026</a:t>
             </a:r>
           </a:p>
         </p:txBody>
@@ -12922,7 +12922,7 @@
                 </a:solidFill>
                 <a:latin typeface="Calibri"/>
               </a:rPr>
-              <a:t>SENTINEL-CI · Démo VP · 25 mai 2026</a:t>
+              <a:t>SENTINEL-CI · Démo Vice Premier Ministre · 25 mai 2026</a:t>
             </a:r>
           </a:p>
         </p:txBody>
@@ -13232,7 +13232,7 @@
                           </a:solidFill>
                           <a:latin typeface="Calibri"/>
                         </a:rPr>
-                        <a:t>Vice-Président de la République</a:t>
+                        <a:t>Vice Premier Ministre de la République</a:t>
                       </a:r>
                     </a:p>
                   </a:txBody>
@@ -13961,7 +13961,7 @@
                 </a:solidFill>
                 <a:latin typeface="Calibri"/>
               </a:rPr>
-              <a:t>SENTINEL-CI · Démo VP · 25 mai 2026</a:t>
+              <a:t>SENTINEL-CI · Démo Vice Premier Ministre · 25 mai 2026</a:t>
             </a:r>
           </a:p>
         </p:txBody>
@@ -14431,7 +14431,7 @@
                 </a:solidFill>
                 <a:latin typeface="Calibri"/>
               </a:rPr>
-              <a:t>SENTINEL-CI · Démo VP · 25 mai 2026</a:t>
+              <a:t>SENTINEL-CI · Démo Vice Premier Ministre · 25 mai 2026</a:t>
             </a:r>
           </a:p>
         </p:txBody>
@@ -14955,7 +14955,7 @@
                 </a:solidFill>
                 <a:latin typeface="Calibri"/>
               </a:rPr>
-              <a:t>SENTINEL-CI · Démo VP · 25 mai 2026</a:t>
+              <a:t>SENTINEL-CI · Démo Vice Premier Ministre · 25 mai 2026</a:t>
             </a:r>
           </a:p>
         </p:txBody>
@@ -15380,7 +15380,7 @@
                 </a:solidFill>
                 <a:latin typeface="Calibri"/>
               </a:rPr>
-              <a:t>SENTINEL-CI · Démo VP · 25 mai 2026</a:t>
+              <a:t>SENTINEL-CI · Démo Vice Premier Ministre · 25 mai 2026</a:t>
             </a:r>
           </a:p>
         </p:txBody>
@@ -18133,7 +18133,7 @@
                 </a:solidFill>
                 <a:latin typeface="Calibri"/>
               </a:rPr>
-              <a:t>SENTINEL-CI · Démo VP · 25 mai 2026</a:t>
+              <a:t>SENTINEL-CI · Démo Vice Premier Ministre · 25 mai 2026</a:t>
             </a:r>
           </a:p>
         </p:txBody>
@@ -18338,7 +18338,7 @@
                 </a:solidFill>
                 <a:latin typeface="Calibri"/>
               </a:rPr>
-              <a:t>SENTINEL-CI · Démo VP · 25 mai 2026</a:t>
+              <a:t>SENTINEL-CI · Démo Vice Premier Ministre · 25 mai 2026</a:t>
             </a:r>
           </a:p>
         </p:txBody>
@@ -18516,7 +18516,7 @@
                 </a:solidFill>
                 <a:latin typeface="Calibri"/>
               </a:rPr>
-              <a:t>SENTINEL-CI · Démo VP · 25 mai 2026</a:t>
+              <a:t>SENTINEL-CI · Démo Vice Premier Ministre · 25 mai 2026</a:t>
             </a:r>
           </a:p>
         </p:txBody>
@@ -19953,7 +19953,7 @@
                 </a:solidFill>
                 <a:latin typeface="Calibri"/>
               </a:rPr>
-              <a:t>SENTINEL-CI · Démo VP · 25 mai 2026</a:t>
+              <a:t>SENTINEL-CI · Démo Vice Premier Ministre · 25 mai 2026</a:t>
             </a:r>
           </a:p>
         </p:txBody>
@@ -20383,7 +20383,7 @@
                 </a:solidFill>
                 <a:latin typeface="Calibri"/>
               </a:rPr>
-              <a:t>SENTINEL-CI · Démo VP · 25 mai 2026</a:t>
+              <a:t>SENTINEL-CI · Démo Vice Premier Ministre · 25 mai 2026</a:t>
             </a:r>
           </a:p>
         </p:txBody>
@@ -21735,7 +21735,7 @@
                 </a:solidFill>
                 <a:latin typeface="Calibri"/>
               </a:rPr>
-              <a:t>SENTINEL-CI · Démo VP · 25 mai 2026</a:t>
+              <a:t>SENTINEL-CI · Démo Vice Premier Ministre · 25 mai 2026</a:t>
             </a:r>
           </a:p>
         </p:txBody>
@@ -21980,7 +21980,7 @@
                 </a:solidFill>
                 <a:latin typeface="Calibri"/>
               </a:rPr>
-              <a:t>SENTINEL-CI · Démo VP · 25 mai 2026</a:t>
+              <a:t>SENTINEL-CI · Démo Vice Premier Ministre · 25 mai 2026</a:t>
             </a:r>
           </a:p>
         </p:txBody>
@@ -22366,7 +22366,7 @@
                 </a:solidFill>
                 <a:latin typeface="Calibri"/>
               </a:rPr>
-              <a:t>SENTINEL-CI · Démo VP · 25 mai 2026</a:t>
+              <a:t>SENTINEL-CI · Démo Vice Premier Ministre · 25 mai 2026</a:t>
             </a:r>
           </a:p>
         </p:txBody>
@@ -22496,7 +22496,7 @@
                 </a:solidFill>
                 <a:latin typeface="Calibri"/>
               </a:rPr>
-              <a:t>Valeurs cohérentes pour la démo (figées dans le seed Osiris CI) — à citer si le VP regarde le bloc INDICATEURS MACRO :</a:t>
+              <a:t>Valeurs cohérentes pour la démo (figées dans le seed Osiris CI) — à citer si le Vice Premier Ministre regarde le bloc INDICATEURS MACRO :</a:t>
             </a:r>
           </a:p>
         </p:txBody>
@@ -23942,7 +23942,7 @@
                 </a:solidFill>
                 <a:latin typeface="Calibri"/>
               </a:rPr>
-              <a:t>SENTINEL-CI · Démo VP · 25 mai 2026</a:t>
+              <a:t>SENTINEL-CI · Démo Vice Premier Ministre · 25 mai 2026</a:t>
             </a:r>
           </a:p>
         </p:txBody>
@@ -24115,7 +24115,7 @@
                 </a:solidFill>
                 <a:latin typeface="Calibri"/>
               </a:rPr>
-              <a:t>SENTINEL-CI · Démo VP · 25 mai 2026</a:t>
+              <a:t>SENTINEL-CI · Démo Vice Premier Ministre · 25 mai 2026</a:t>
             </a:r>
           </a:p>
         </p:txBody>
@@ -24293,7 +24293,7 @@
                 </a:solidFill>
                 <a:latin typeface="Calibri"/>
               </a:rPr>
-              <a:t>SENTINEL-CI · Démo VP · 25 mai 2026</a:t>
+              <a:t>SENTINEL-CI · Démo Vice Premier Ministre · 25 mai 2026</a:t>
             </a:r>
           </a:p>
         </p:txBody>
@@ -27045,7 +27045,7 @@
                 </a:solidFill>
                 <a:latin typeface="Calibri"/>
               </a:rPr>
-              <a:t>SENTINEL-CI · Démo VP · 25 mai 2026</a:t>
+              <a:t>SENTINEL-CI · Démo Vice Premier Ministre · 25 mai 2026</a:t>
             </a:r>
           </a:p>
         </p:txBody>
@@ -29600,7 +29600,7 @@
                 </a:solidFill>
                 <a:latin typeface="Calibri"/>
               </a:rPr>
-              <a:t>SENTINEL-CI · Démo VP · 25 mai 2026</a:t>
+              <a:t>SENTINEL-CI · Démo Vice Premier Ministre · 25 mai 2026</a:t>
             </a:r>
           </a:p>
         </p:txBody>
@@ -32792,7 +32792,7 @@
                 </a:solidFill>
                 <a:latin typeface="Calibri"/>
               </a:rPr>
-              <a:t>SENTINEL-CI · Démo VP · 25 mai 2026</a:t>
+              <a:t>SENTINEL-CI · Démo Vice Premier Ministre · 25 mai 2026</a:t>
             </a:r>
           </a:p>
         </p:txBody>
@@ -34008,7 +34008,7 @@
                 </a:solidFill>
                 <a:latin typeface="Calibri"/>
               </a:rPr>
-              <a:t>SENTINEL-CI · Démo VP · 25 mai 2026</a:t>
+              <a:t>SENTINEL-CI · Démo Vice Premier Ministre · 25 mai 2026</a:t>
             </a:r>
           </a:p>
         </p:txBody>
@@ -34150,7 +34150,7 @@
                 </a:solidFill>
                 <a:latin typeface="Calibri"/>
               </a:rPr>
-              <a:t>« Monsieur le Vice-Président, voici SENTINEL-CI : un cockpit souverain de gouvernance, opéré en mode advisory — AYA propose, le Cabinet décide. »</a:t>
+              <a:t>« Monsieur le Vice Premier Ministre, voici SENTINEL-CI : un cockpit souverain de gouvernance, opéré en mode advisory — AYA propose, le Cabinet décide. »</a:t>
             </a:r>
           </a:p>
           <a:p>
@@ -34333,7 +34333,7 @@
                 </a:solidFill>
                 <a:latin typeface="Calibri"/>
               </a:rPr>
-              <a:t>SENTINEL-CI · Démo VP · 25 mai 2026</a:t>
+              <a:t>SENTINEL-CI · Démo Vice Premier Ministre · 25 mai 2026</a:t>
             </a:r>
           </a:p>
         </p:txBody>
@@ -34570,16 +34570,16 @@
                 </a:solidFill>
                 <a:latin typeface="Calibri"/>
               </a:rPr>
-              <a:t>« Monsieur le Vice-Président »</a:t>
-            </a:r>
-            <a:r>
-              <a:rPr sz="1300">
-                <a:solidFill>
-                  <a:srgbClr val="E2E8F0"/>
-                </a:solidFill>
-                <a:latin typeface="Calibri"/>
-              </a:rPr>
-              <a:t> (jamais « M. le Vice-Président » — TTS prononce « M » comme la lettre).</a:t>
+              <a:t>« Monsieur le Vice Premier Ministre »</a:t>
+            </a:r>
+            <a:r>
+              <a:rPr sz="1300">
+                <a:solidFill>
+                  <a:srgbClr val="E2E8F0"/>
+                </a:solidFill>
+                <a:latin typeface="Calibri"/>
+              </a:rPr>
+              <a:t> (jamais « M. le Vice Premier Ministre » — TTS prononce « M » comme la lettre).</a:t>
             </a:r>
           </a:p>
           <a:p>
@@ -34789,7 +34789,7 @@
                 </a:solidFill>
                 <a:latin typeface="Calibri"/>
               </a:rPr>
-              <a:t>SENTINEL-CI · Démo VP · 25 mai 2026</a:t>
+              <a:t>SENTINEL-CI · Démo Vice Premier Ministre · 25 mai 2026</a:t>
             </a:r>
           </a:p>
         </p:txBody>
@@ -34902,7 +34902,7 @@
                 </a:solidFill>
                 <a:latin typeface="Calibri"/>
               </a:rPr>
-              <a:t> démo VP</a:t>
+              <a:t> démo Vice Premier Ministre</a:t>
             </a:r>
           </a:p>
         </p:txBody>
@@ -35078,7 +35078,7 @@
                 </a:solidFill>
                 <a:latin typeface="Calibri"/>
               </a:rPr>
-              <a:t>SENTINEL-CI · Démo VP · 25 mai 2026</a:t>
+              <a:t>SENTINEL-CI · Démo Vice Premier Ministre · 25 mai 2026</a:t>
             </a:r>
           </a:p>
         </p:txBody>
@@ -35256,7 +35256,7 @@
                 </a:solidFill>
                 <a:latin typeface="Calibri"/>
               </a:rPr>
-              <a:t>SENTINEL-CI · Démo VP · 25 mai 2026</a:t>
+              <a:t>SENTINEL-CI · Démo Vice Premier Ministre · 25 mai 2026</a:t>
             </a:r>
           </a:p>
         </p:txBody>
@@ -35740,7 +35740,7 @@
                 </a:solidFill>
                 <a:latin typeface="Calibri"/>
               </a:rPr>
-              <a:t>SENTINEL-CI · Démo VP · 25 mai 2026</a:t>
+              <a:t>SENTINEL-CI · Démo Vice Premier Ministre · 25 mai 2026</a:t>
             </a:r>
           </a:p>
         </p:txBody>
@@ -37325,7 +37325,7 @@
                 </a:solidFill>
                 <a:latin typeface="Calibri"/>
               </a:rPr>
-              <a:t>SENTINEL-CI · Démo VP · 25 mai 2026</a:t>
+              <a:t>SENTINEL-CI · Démo Vice Premier Ministre · 25 mai 2026</a:t>
             </a:r>
           </a:p>
         </p:txBody>
@@ -37592,7 +37592,7 @@
                 </a:solidFill>
                 <a:latin typeface="Calibri"/>
               </a:rPr>
-              <a:t>SENTINEL-CI · Démo VP · 25 mai 2026</a:t>
+              <a:t>SENTINEL-CI · Démo Vice Premier Ministre · 25 mai 2026</a:t>
             </a:r>
           </a:p>
         </p:txBody>
@@ -38081,7 +38081,7 @@
                 </a:solidFill>
                 <a:latin typeface="Calibri"/>
               </a:rPr>
-              <a:t>SENTINEL-CI · Démo VP · 25 mai 2026</a:t>
+              <a:t>SENTINEL-CI · Démo Vice Premier Ministre · 25 mai 2026</a:t>
             </a:r>
           </a:p>
         </p:txBody>
